--- a/2.03ButtonsAndFunctions/Review.pptx
+++ b/2.03ButtonsAndFunctions/Review.pptx
@@ -249,7 +249,7 @@
           <a:p>
             <a:fld id="{19104133-B5B0-4351-8158-4F0E5EB1E2BF}" type="datetimeFigureOut">
               <a:rPr lang="en-US" smtClean="0"/>
-              <a:t>9/24/2025</a:t>
+              <a:t>6/8/2026</a:t>
             </a:fld>
             <a:endParaRPr lang="en-US"/>
           </a:p>
@@ -3785,7 +3785,7 @@
             <a:fld id="{1C2D31DE-C454-491C-B5C3-F097855E3DF7}" type="datetime4">
               <a:rPr lang="en-US" smtClean="0"/>
               <a:pPr/>
-              <a:t>September 24, 2025</a:t>
+              <a:t>June 8, 2026</a:t>
             </a:fld>
             <a:endParaRPr lang="en-US" dirty="0"/>
           </a:p>
@@ -7177,7 +7177,7 @@
           <a:p>
             <a:fld id="{5958763E-B898-436D-883D-03711491D54A}" type="datetimeFigureOut">
               <a:rPr lang="en-US" smtClean="0"/>
-              <a:t>9/24/2025</a:t>
+              <a:t>6/8/2026</a:t>
             </a:fld>
             <a:endParaRPr lang="en-US"/>
           </a:p>
@@ -7370,7 +7370,7 @@
           <a:p>
             <a:fld id="{5958763E-B898-436D-883D-03711491D54A}" type="datetimeFigureOut">
               <a:rPr lang="en-US" smtClean="0"/>
-              <a:t>9/24/2025</a:t>
+              <a:t>6/8/2026</a:t>
             </a:fld>
             <a:endParaRPr lang="en-US"/>
           </a:p>
@@ -7620,7 +7620,7 @@
           <a:p>
             <a:fld id="{5958763E-B898-436D-883D-03711491D54A}" type="datetimeFigureOut">
               <a:rPr lang="en-US" smtClean="0"/>
-              <a:t>9/24/2025</a:t>
+              <a:t>6/8/2026</a:t>
             </a:fld>
             <a:endParaRPr lang="en-US"/>
           </a:p>
@@ -7968,7 +7968,7 @@
           <a:p>
             <a:fld id="{5958763E-B898-436D-883D-03711491D54A}" type="datetimeFigureOut">
               <a:rPr lang="en-US" smtClean="0"/>
-              <a:t>9/24/2025</a:t>
+              <a:t>6/8/2026</a:t>
             </a:fld>
             <a:endParaRPr lang="en-US"/>
           </a:p>
@@ -8384,7 +8384,7 @@
           <a:p>
             <a:fld id="{5958763E-B898-436D-883D-03711491D54A}" type="datetimeFigureOut">
               <a:rPr lang="en-US" smtClean="0"/>
-              <a:t>9/24/2025</a:t>
+              <a:t>6/8/2026</a:t>
             </a:fld>
             <a:endParaRPr lang="en-US"/>
           </a:p>
@@ -8885,7 +8885,7 @@
           <a:p>
             <a:fld id="{5958763E-B898-436D-883D-03711491D54A}" type="datetimeFigureOut">
               <a:rPr lang="en-US" smtClean="0"/>
-              <a:t>9/24/2025</a:t>
+              <a:t>6/8/2026</a:t>
             </a:fld>
             <a:endParaRPr lang="en-US"/>
           </a:p>
@@ -9336,7 +9336,7 @@
           <a:p>
             <a:fld id="{5958763E-B898-436D-883D-03711491D54A}" type="datetimeFigureOut">
               <a:rPr lang="en-US" smtClean="0"/>
-              <a:t>9/24/2025</a:t>
+              <a:t>6/8/2026</a:t>
             </a:fld>
             <a:endParaRPr lang="en-US"/>
           </a:p>
@@ -9947,7 +9947,7 @@
           <a:p>
             <a:fld id="{5958763E-B898-436D-883D-03711491D54A}" type="datetimeFigureOut">
               <a:rPr lang="en-US" smtClean="0"/>
-              <a:t>9/24/2025</a:t>
+              <a:t>6/8/2026</a:t>
             </a:fld>
             <a:endParaRPr lang="en-US"/>
           </a:p>
@@ -10718,7 +10718,7 @@
           <a:p>
             <a:fld id="{5958763E-B898-436D-883D-03711491D54A}" type="datetimeFigureOut">
               <a:rPr lang="en-US" smtClean="0"/>
-              <a:t>9/24/2025</a:t>
+              <a:t>6/8/2026</a:t>
             </a:fld>
             <a:endParaRPr lang="en-US"/>
           </a:p>
@@ -10822,7 +10822,7 @@
           <a:p>
             <a:fld id="{5958763E-B898-436D-883D-03711491D54A}" type="datetimeFigureOut">
               <a:rPr lang="en-US" smtClean="0"/>
-              <a:t>9/24/2025</a:t>
+              <a:t>6/8/2026</a:t>
             </a:fld>
             <a:endParaRPr lang="en-US"/>
           </a:p>
@@ -11149,7 +11149,7 @@
             <a:fld id="{1C2D31DE-C454-491C-B5C3-F097855E3DF7}" type="datetime4">
               <a:rPr lang="en-US" smtClean="0"/>
               <a:pPr/>
-              <a:t>September 24, 2025</a:t>
+              <a:t>June 8, 2026</a:t>
             </a:fld>
             <a:endParaRPr lang="en-US" dirty="0"/>
           </a:p>
@@ -14301,7 +14301,7 @@
           <a:p>
             <a:fld id="{5958763E-B898-436D-883D-03711491D54A}" type="datetimeFigureOut">
               <a:rPr lang="en-US" smtClean="0"/>
-              <a:t>9/24/2025</a:t>
+              <a:t>6/8/2026</a:t>
             </a:fld>
             <a:endParaRPr lang="en-US"/>
           </a:p>
@@ -14425,7 +14425,7 @@
           <a:p>
             <a:fld id="{5958763E-B898-436D-883D-03711491D54A}" type="datetimeFigureOut">
               <a:rPr lang="en-US" smtClean="0"/>
-              <a:t>9/24/2025</a:t>
+              <a:t>6/8/2026</a:t>
             </a:fld>
             <a:endParaRPr lang="en-US"/>
           </a:p>
@@ -14549,7 +14549,7 @@
           <a:p>
             <a:fld id="{5958763E-B898-436D-883D-03711491D54A}" type="datetimeFigureOut">
               <a:rPr lang="en-US" smtClean="0"/>
-              <a:t>9/24/2025</a:t>
+              <a:t>6/8/2026</a:t>
             </a:fld>
             <a:endParaRPr lang="en-US"/>
           </a:p>
@@ -14673,7 +14673,7 @@
           <a:p>
             <a:fld id="{5958763E-B898-436D-883D-03711491D54A}" type="datetimeFigureOut">
               <a:rPr lang="en-US" smtClean="0"/>
-              <a:t>9/24/2025</a:t>
+              <a:t>6/8/2026</a:t>
             </a:fld>
             <a:endParaRPr lang="en-US"/>
           </a:p>
@@ -14797,7 +14797,7 @@
           <a:p>
             <a:fld id="{5958763E-B898-436D-883D-03711491D54A}" type="datetimeFigureOut">
               <a:rPr lang="en-US" smtClean="0"/>
-              <a:t>9/24/2025</a:t>
+              <a:t>6/8/2026</a:t>
             </a:fld>
             <a:endParaRPr lang="en-US"/>
           </a:p>
@@ -14921,7 +14921,7 @@
           <a:p>
             <a:fld id="{5958763E-B898-436D-883D-03711491D54A}" type="datetimeFigureOut">
               <a:rPr lang="en-US" smtClean="0"/>
-              <a:t>9/24/2025</a:t>
+              <a:t>6/8/2026</a:t>
             </a:fld>
             <a:endParaRPr lang="en-US"/>
           </a:p>
@@ -15045,7 +15045,7 @@
           <a:p>
             <a:fld id="{5958763E-B898-436D-883D-03711491D54A}" type="datetimeFigureOut">
               <a:rPr lang="en-US" smtClean="0"/>
-              <a:t>9/24/2025</a:t>
+              <a:t>6/8/2026</a:t>
             </a:fld>
             <a:endParaRPr lang="en-US"/>
           </a:p>
@@ -15169,7 +15169,7 @@
           <a:p>
             <a:fld id="{5958763E-B898-436D-883D-03711491D54A}" type="datetimeFigureOut">
               <a:rPr lang="en-US" smtClean="0"/>
-              <a:t>9/24/2025</a:t>
+              <a:t>6/8/2026</a:t>
             </a:fld>
             <a:endParaRPr lang="en-US"/>
           </a:p>
@@ -15302,7 +15302,7 @@
           <a:p>
             <a:fld id="{5958763E-B898-436D-883D-03711491D54A}" type="datetimeFigureOut">
               <a:rPr lang="en-US" smtClean="0"/>
-              <a:t>9/24/2025</a:t>
+              <a:t>6/8/2026</a:t>
             </a:fld>
             <a:endParaRPr lang="en-US"/>
           </a:p>
@@ -18641,7 +18641,7 @@
             <a:fld id="{1C2D31DE-C454-491C-B5C3-F097855E3DF7}" type="datetime4">
               <a:rPr lang="en-US" smtClean="0"/>
               <a:pPr/>
-              <a:t>September 24, 2025</a:t>
+              <a:t>June 8, 2026</a:t>
             </a:fld>
             <a:endParaRPr lang="en-US" dirty="0"/>
           </a:p>
@@ -30877,7 +30877,7 @@
           <a:p>
             <a:fld id="{5958763E-B898-436D-883D-03711491D54A}" type="datetimeFigureOut">
               <a:rPr lang="en-US" smtClean="0"/>
-              <a:t>9/24/2025</a:t>
+              <a:t>6/8/2026</a:t>
             </a:fld>
             <a:endParaRPr lang="en-US"/>
           </a:p>
@@ -31279,7 +31279,7 @@
           <a:p>
             <a:fld id="{5958763E-B898-436D-883D-03711491D54A}" type="datetimeFigureOut">
               <a:rPr lang="en-US" smtClean="0"/>
-              <a:t>9/24/2025</a:t>
+              <a:t>6/8/2026</a:t>
             </a:fld>
             <a:endParaRPr lang="en-US"/>
           </a:p>
@@ -31573,7 +31573,7 @@
           <a:p>
             <a:fld id="{5958763E-B898-436D-883D-03711491D54A}" type="datetimeFigureOut">
               <a:rPr lang="en-US" smtClean="0"/>
-              <a:t>9/24/2025</a:t>
+              <a:t>6/8/2026</a:t>
             </a:fld>
             <a:endParaRPr lang="en-US"/>
           </a:p>
@@ -31774,7 +31774,7 @@
           <a:p>
             <a:fld id="{5958763E-B898-436D-883D-03711491D54A}" type="datetimeFigureOut">
               <a:rPr lang="en-US" smtClean="0"/>
-              <a:t>9/24/2025</a:t>
+              <a:t>6/8/2026</a:t>
             </a:fld>
             <a:endParaRPr lang="en-US"/>
           </a:p>
@@ -32035,7 +32035,7 @@
           <a:p>
             <a:fld id="{5958763E-B898-436D-883D-03711491D54A}" type="datetimeFigureOut">
               <a:rPr lang="en-US" smtClean="0"/>
-              <a:t>9/24/2025</a:t>
+              <a:t>6/8/2026</a:t>
             </a:fld>
             <a:endParaRPr lang="en-US"/>
           </a:p>
@@ -32543,7 +32543,7 @@
           <a:p>
             <a:fld id="{5958763E-B898-436D-883D-03711491D54A}" type="datetimeFigureOut">
               <a:rPr lang="en-US" smtClean="0"/>
-              <a:t>9/24/2025</a:t>
+              <a:t>6/8/2026</a:t>
             </a:fld>
             <a:endParaRPr lang="en-US"/>
           </a:p>
@@ -33022,7 +33022,7 @@
           <a:p>
             <a:fld id="{5958763E-B898-436D-883D-03711491D54A}" type="datetimeFigureOut">
               <a:rPr lang="en-US" smtClean="0"/>
-              <a:t>9/24/2025</a:t>
+              <a:t>6/8/2026</a:t>
             </a:fld>
             <a:endParaRPr lang="en-US"/>
           </a:p>
@@ -33841,7 +33841,7 @@
           <a:p>
             <a:fld id="{5958763E-B898-436D-883D-03711491D54A}" type="datetimeFigureOut">
               <a:rPr lang="en-US" smtClean="0"/>
-              <a:t>9/24/2025</a:t>
+              <a:t>6/8/2026</a:t>
             </a:fld>
             <a:endParaRPr lang="en-US"/>
           </a:p>
@@ -34042,7 +34042,7 @@
           <a:p>
             <a:fld id="{5958763E-B898-436D-883D-03711491D54A}" type="datetimeFigureOut">
               <a:rPr lang="en-US" smtClean="0"/>
-              <a:t>9/24/2025</a:t>
+              <a:t>6/8/2026</a:t>
             </a:fld>
             <a:endParaRPr lang="en-US"/>
           </a:p>
@@ -34377,7 +34377,7 @@
           <a:p>
             <a:fld id="{5958763E-B898-436D-883D-03711491D54A}" type="datetimeFigureOut">
               <a:rPr lang="en-US" smtClean="0"/>
-              <a:t>9/24/2025</a:t>
+              <a:t>6/8/2026</a:t>
             </a:fld>
             <a:endParaRPr lang="en-US"/>
           </a:p>
@@ -34607,7 +34607,7 @@
           <a:p>
             <a:fld id="{5958763E-B898-436D-883D-03711491D54A}" type="datetimeFigureOut">
               <a:rPr lang="en-US" smtClean="0"/>
-              <a:t>9/24/2025</a:t>
+              <a:t>6/8/2026</a:t>
             </a:fld>
             <a:endParaRPr lang="en-US"/>
           </a:p>
@@ -34851,7 +34851,7 @@
           <a:p>
             <a:fld id="{5958763E-B898-436D-883D-03711491D54A}" type="datetimeFigureOut">
               <a:rPr lang="en-US" smtClean="0"/>
-              <a:t>9/24/2025</a:t>
+              <a:t>6/8/2026</a:t>
             </a:fld>
             <a:endParaRPr lang="en-US"/>
           </a:p>
@@ -35399,7 +35399,7 @@
         <p:spPr>
           <a:xfrm>
             <a:off x="381000" y="3429000"/>
-            <a:ext cx="4883068" cy="553998"/>
+            <a:ext cx="5859489" cy="553998"/>
           </a:xfrm>
         </p:spPr>
         <p:txBody>
@@ -35407,12 +35407,8 @@
           <a:lstStyle/>
           <a:p>
             <a:r>
-              <a:rPr lang="en-US" dirty="0"/>
-              <a:t>Hy-Tech Club: </a:t>
-            </a:r>
-            <a:r>
               <a:rPr lang="en-US"/>
-              <a:t>Web 102</a:t>
+              <a:t>HTO: Website Development</a:t>
             </a:r>
             <a:endParaRPr lang="en-US" dirty="0"/>
           </a:p>
